--- a/public/templates/slide/技術報告_スタンダード水色_TemplateOnly.pptx
+++ b/public/templates/slide/技術報告_スタンダード水色_TemplateOnly.pptx
@@ -446,6 +446,36 @@
                 <a:ea typeface="Yu Gothic"/>
               </a:defRPr>
             </a:lvl1pPr>
+            <a:lvl2pPr algn="l" marL="0" indent="0">
+              <a:buNone/>
+              <a:defRPr sz="1050" b="0">
+                <a:solidFill>
+                  <a:srgbClr val="E8F4FA"/>
+                </a:solidFill>
+                <a:latin typeface="Yu Gothic"/>
+                <a:ea typeface="Yu Gothic"/>
+              </a:defRPr>
+            </a:lvl2pPr>
+            <a:lvl3pPr algn="l" marL="0" indent="0">
+              <a:buNone/>
+              <a:defRPr sz="900" b="0">
+                <a:solidFill>
+                  <a:srgbClr val="E8F4FA"/>
+                </a:solidFill>
+                <a:latin typeface="Yu Gothic"/>
+                <a:ea typeface="Yu Gothic"/>
+              </a:defRPr>
+            </a:lvl3pPr>
+            <a:lvl4pPr algn="l" marL="0" indent="0">
+              <a:buNone/>
+              <a:defRPr sz="750" b="0">
+                <a:solidFill>
+                  <a:srgbClr val="E8F4FA"/>
+                </a:solidFill>
+                <a:latin typeface="Yu Gothic"/>
+                <a:ea typeface="Yu Gothic"/>
+              </a:defRPr>
+            </a:lvl4pPr>
           </a:lstStyle>
           <a:p>
             <a:r>
@@ -689,6 +719,36 @@
                 <a:ea typeface="Yu Gothic"/>
               </a:defRPr>
             </a:lvl1pPr>
+            <a:lvl2pPr algn="l" marL="0" indent="0">
+              <a:buNone/>
+              <a:defRPr sz="1050" b="0">
+                <a:solidFill>
+                  <a:srgbClr val="D6E9F2"/>
+                </a:solidFill>
+                <a:latin typeface="Consolas"/>
+                <a:ea typeface="Yu Gothic"/>
+              </a:defRPr>
+            </a:lvl2pPr>
+            <a:lvl3pPr algn="l" marL="0" indent="0">
+              <a:buNone/>
+              <a:defRPr sz="900" b="0">
+                <a:solidFill>
+                  <a:srgbClr val="D6E9F2"/>
+                </a:solidFill>
+                <a:latin typeface="Consolas"/>
+                <a:ea typeface="Yu Gothic"/>
+              </a:defRPr>
+            </a:lvl3pPr>
+            <a:lvl4pPr algn="l" marL="0" indent="0">
+              <a:buNone/>
+              <a:defRPr sz="750" b="0">
+                <a:solidFill>
+                  <a:srgbClr val="D6E9F2"/>
+                </a:solidFill>
+                <a:latin typeface="Consolas"/>
+                <a:ea typeface="Yu Gothic"/>
+              </a:defRPr>
+            </a:lvl4pPr>
           </a:lstStyle>
           <a:p>
             <a:r>
@@ -727,6 +787,36 @@
                 <a:ea typeface="Yu Gothic"/>
               </a:defRPr>
             </a:lvl1pPr>
+            <a:lvl2pPr algn="l" marL="0" indent="0">
+              <a:buNone/>
+              <a:defRPr sz="950" b="0">
+                <a:solidFill>
+                  <a:srgbClr val="5A6B75"/>
+                </a:solidFill>
+                <a:latin typeface="Yu Gothic"/>
+                <a:ea typeface="Yu Gothic"/>
+              </a:defRPr>
+            </a:lvl2pPr>
+            <a:lvl3pPr algn="l" marL="0" indent="0">
+              <a:buNone/>
+              <a:defRPr sz="850" b="0">
+                <a:solidFill>
+                  <a:srgbClr val="5A6B75"/>
+                </a:solidFill>
+                <a:latin typeface="Yu Gothic"/>
+                <a:ea typeface="Yu Gothic"/>
+              </a:defRPr>
+            </a:lvl3pPr>
+            <a:lvl4pPr algn="l" marL="0" indent="0">
+              <a:buNone/>
+              <a:defRPr sz="700" b="0">
+                <a:solidFill>
+                  <a:srgbClr val="5A6B75"/>
+                </a:solidFill>
+                <a:latin typeface="Yu Gothic"/>
+                <a:ea typeface="Yu Gothic"/>
+              </a:defRPr>
+            </a:lvl4pPr>
           </a:lstStyle>
           <a:p>
             <a:r>
@@ -878,6 +968,20 @@
                 </a:solidFill>
               </a:defRPr>
             </a:lvl1pPr>
+            <a:lvl2pPr algn="l">
+              <a:defRPr sz="1750" b="0">
+                <a:solidFill>
+                  <a:srgbClr val="1A1A1A"/>
+                </a:solidFill>
+              </a:defRPr>
+            </a:lvl2pPr>
+            <a:lvl3pPr algn="l">
+              <a:defRPr sz="1500" b="0">
+                <a:solidFill>
+                  <a:srgbClr val="1A1A1A"/>
+                </a:solidFill>
+              </a:defRPr>
+            </a:lvl3pPr>
           </a:lstStyle>
           <a:p>
             <a:pPr lvl="0"/>
@@ -1373,6 +1477,39 @@
                 <a:cs typeface="Yu Gothic"/>
               </a:defRPr>
             </a:lvl1pPr>
+            <a:lvl2pPr algn="ctr" marL="0" indent="0">
+              <a:buNone/>
+              <a:defRPr sz="1250" b="1">
+                <a:solidFill>
+                  <a:srgbClr val="5A6B75"/>
+                </a:solidFill>
+                <a:latin typeface="Yu Gothic"/>
+                <a:ea typeface="Yu Gothic"/>
+                <a:cs typeface="Yu Gothic"/>
+              </a:defRPr>
+            </a:lvl2pPr>
+            <a:lvl3pPr algn="ctr" marL="0" indent="0">
+              <a:buNone/>
+              <a:defRPr sz="1050" b="1">
+                <a:solidFill>
+                  <a:srgbClr val="5A6B75"/>
+                </a:solidFill>
+                <a:latin typeface="Yu Gothic"/>
+                <a:ea typeface="Yu Gothic"/>
+                <a:cs typeface="Yu Gothic"/>
+              </a:defRPr>
+            </a:lvl3pPr>
+            <a:lvl4pPr algn="ctr" marL="0" indent="0">
+              <a:buNone/>
+              <a:defRPr sz="900" b="1">
+                <a:solidFill>
+                  <a:srgbClr val="5A6B75"/>
+                </a:solidFill>
+                <a:latin typeface="Yu Gothic"/>
+                <a:ea typeface="Yu Gothic"/>
+                <a:cs typeface="Yu Gothic"/>
+              </a:defRPr>
+            </a:lvl4pPr>
           </a:lstStyle>
           <a:p>
             <a:r>
@@ -1451,6 +1588,39 @@
                 <a:cs typeface="Yu Gothic"/>
               </a:defRPr>
             </a:lvl1pPr>
+            <a:lvl2pPr algn="ctr" marL="0" indent="0">
+              <a:buNone/>
+              <a:defRPr sz="1050" b="0">
+                <a:solidFill>
+                  <a:srgbClr val="1A1A1A"/>
+                </a:solidFill>
+                <a:latin typeface="Yu Gothic"/>
+                <a:ea typeface="Yu Gothic"/>
+                <a:cs typeface="Yu Gothic"/>
+              </a:defRPr>
+            </a:lvl2pPr>
+            <a:lvl3pPr algn="ctr" marL="0" indent="0">
+              <a:buNone/>
+              <a:defRPr sz="900" b="0">
+                <a:solidFill>
+                  <a:srgbClr val="1A1A1A"/>
+                </a:solidFill>
+                <a:latin typeface="Yu Gothic"/>
+                <a:ea typeface="Yu Gothic"/>
+                <a:cs typeface="Yu Gothic"/>
+              </a:defRPr>
+            </a:lvl3pPr>
+            <a:lvl4pPr algn="ctr" marL="0" indent="0">
+              <a:buNone/>
+              <a:defRPr sz="750" b="0">
+                <a:solidFill>
+                  <a:srgbClr val="1A1A1A"/>
+                </a:solidFill>
+                <a:latin typeface="Yu Gothic"/>
+                <a:ea typeface="Yu Gothic"/>
+                <a:cs typeface="Yu Gothic"/>
+              </a:defRPr>
+            </a:lvl4pPr>
           </a:lstStyle>
           <a:p>
             <a:r>
@@ -1490,6 +1660,39 @@
                 <a:cs typeface="Yu Gothic"/>
               </a:defRPr>
             </a:lvl1pPr>
+            <a:lvl2pPr algn="ctr" marL="0" indent="0">
+              <a:buNone/>
+              <a:defRPr sz="1250" b="1">
+                <a:solidFill>
+                  <a:srgbClr val="5A6B75"/>
+                </a:solidFill>
+                <a:latin typeface="Yu Gothic"/>
+                <a:ea typeface="Yu Gothic"/>
+                <a:cs typeface="Yu Gothic"/>
+              </a:defRPr>
+            </a:lvl2pPr>
+            <a:lvl3pPr algn="ctr" marL="0" indent="0">
+              <a:buNone/>
+              <a:defRPr sz="1050" b="1">
+                <a:solidFill>
+                  <a:srgbClr val="5A6B75"/>
+                </a:solidFill>
+                <a:latin typeface="Yu Gothic"/>
+                <a:ea typeface="Yu Gothic"/>
+                <a:cs typeface="Yu Gothic"/>
+              </a:defRPr>
+            </a:lvl3pPr>
+            <a:lvl4pPr algn="ctr" marL="0" indent="0">
+              <a:buNone/>
+              <a:defRPr sz="900" b="1">
+                <a:solidFill>
+                  <a:srgbClr val="5A6B75"/>
+                </a:solidFill>
+                <a:latin typeface="Yu Gothic"/>
+                <a:ea typeface="Yu Gothic"/>
+                <a:cs typeface="Yu Gothic"/>
+              </a:defRPr>
+            </a:lvl4pPr>
           </a:lstStyle>
           <a:p>
             <a:r>
@@ -1568,6 +1771,39 @@
                 <a:cs typeface="Yu Gothic"/>
               </a:defRPr>
             </a:lvl1pPr>
+            <a:lvl2pPr algn="ctr" marL="0" indent="0">
+              <a:buNone/>
+              <a:defRPr sz="1050" b="0">
+                <a:solidFill>
+                  <a:srgbClr val="1A1A1A"/>
+                </a:solidFill>
+                <a:latin typeface="Yu Gothic"/>
+                <a:ea typeface="Yu Gothic"/>
+                <a:cs typeface="Yu Gothic"/>
+              </a:defRPr>
+            </a:lvl2pPr>
+            <a:lvl3pPr algn="ctr" marL="0" indent="0">
+              <a:buNone/>
+              <a:defRPr sz="900" b="0">
+                <a:solidFill>
+                  <a:srgbClr val="1A1A1A"/>
+                </a:solidFill>
+                <a:latin typeface="Yu Gothic"/>
+                <a:ea typeface="Yu Gothic"/>
+                <a:cs typeface="Yu Gothic"/>
+              </a:defRPr>
+            </a:lvl3pPr>
+            <a:lvl4pPr algn="ctr" marL="0" indent="0">
+              <a:buNone/>
+              <a:defRPr sz="750" b="0">
+                <a:solidFill>
+                  <a:srgbClr val="1A1A1A"/>
+                </a:solidFill>
+                <a:latin typeface="Yu Gothic"/>
+                <a:ea typeface="Yu Gothic"/>
+                <a:cs typeface="Yu Gothic"/>
+              </a:defRPr>
+            </a:lvl4pPr>
           </a:lstStyle>
           <a:p>
             <a:r>
@@ -1607,6 +1843,39 @@
                 <a:cs typeface="Yu Gothic"/>
               </a:defRPr>
             </a:lvl1pPr>
+            <a:lvl2pPr algn="ctr" marL="0" indent="0">
+              <a:buNone/>
+              <a:defRPr sz="1250" b="1">
+                <a:solidFill>
+                  <a:srgbClr val="5A6B75"/>
+                </a:solidFill>
+                <a:latin typeface="Yu Gothic"/>
+                <a:ea typeface="Yu Gothic"/>
+                <a:cs typeface="Yu Gothic"/>
+              </a:defRPr>
+            </a:lvl2pPr>
+            <a:lvl3pPr algn="ctr" marL="0" indent="0">
+              <a:buNone/>
+              <a:defRPr sz="1050" b="1">
+                <a:solidFill>
+                  <a:srgbClr val="5A6B75"/>
+                </a:solidFill>
+                <a:latin typeface="Yu Gothic"/>
+                <a:ea typeface="Yu Gothic"/>
+                <a:cs typeface="Yu Gothic"/>
+              </a:defRPr>
+            </a:lvl3pPr>
+            <a:lvl4pPr algn="ctr" marL="0" indent="0">
+              <a:buNone/>
+              <a:defRPr sz="900" b="1">
+                <a:solidFill>
+                  <a:srgbClr val="5A6B75"/>
+                </a:solidFill>
+                <a:latin typeface="Yu Gothic"/>
+                <a:ea typeface="Yu Gothic"/>
+                <a:cs typeface="Yu Gothic"/>
+              </a:defRPr>
+            </a:lvl4pPr>
           </a:lstStyle>
           <a:p>
             <a:r>
@@ -1685,6 +1954,39 @@
                 <a:cs typeface="Yu Gothic"/>
               </a:defRPr>
             </a:lvl1pPr>
+            <a:lvl2pPr algn="ctr" marL="0" indent="0">
+              <a:buNone/>
+              <a:defRPr sz="1050" b="0">
+                <a:solidFill>
+                  <a:srgbClr val="1A1A1A"/>
+                </a:solidFill>
+                <a:latin typeface="Yu Gothic"/>
+                <a:ea typeface="Yu Gothic"/>
+                <a:cs typeface="Yu Gothic"/>
+              </a:defRPr>
+            </a:lvl2pPr>
+            <a:lvl3pPr algn="ctr" marL="0" indent="0">
+              <a:buNone/>
+              <a:defRPr sz="900" b="0">
+                <a:solidFill>
+                  <a:srgbClr val="1A1A1A"/>
+                </a:solidFill>
+                <a:latin typeface="Yu Gothic"/>
+                <a:ea typeface="Yu Gothic"/>
+                <a:cs typeface="Yu Gothic"/>
+              </a:defRPr>
+            </a:lvl3pPr>
+            <a:lvl4pPr algn="ctr" marL="0" indent="0">
+              <a:buNone/>
+              <a:defRPr sz="750" b="0">
+                <a:solidFill>
+                  <a:srgbClr val="1A1A1A"/>
+                </a:solidFill>
+                <a:latin typeface="Yu Gothic"/>
+                <a:ea typeface="Yu Gothic"/>
+                <a:cs typeface="Yu Gothic"/>
+              </a:defRPr>
+            </a:lvl4pPr>
           </a:lstStyle>
           <a:p>
             <a:r>
@@ -2091,6 +2393,28 @@
                 <a:cs typeface="Yu Gothic"/>
               </a:defRPr>
             </a:lvl1pPr>
+            <a:lvl2pPr algn="ctr" marL="0" indent="0">
+              <a:buNone/>
+              <a:defRPr sz="1950" b="1">
+                <a:solidFill>
+                  <a:srgbClr val="FFFFFF"/>
+                </a:solidFill>
+                <a:latin typeface="Yu Gothic"/>
+                <a:ea typeface="Yu Gothic"/>
+                <a:cs typeface="Yu Gothic"/>
+              </a:defRPr>
+            </a:lvl2pPr>
+            <a:lvl3pPr algn="ctr" marL="0" indent="0">
+              <a:buNone/>
+              <a:defRPr sz="1650" b="1">
+                <a:solidFill>
+                  <a:srgbClr val="FFFFFF"/>
+                </a:solidFill>
+                <a:latin typeface="Yu Gothic"/>
+                <a:ea typeface="Yu Gothic"/>
+                <a:cs typeface="Yu Gothic"/>
+              </a:defRPr>
+            </a:lvl3pPr>
           </a:lstStyle>
           <a:p>
             <a:r>
@@ -2130,6 +2454,39 @@
                 <a:cs typeface="Yu Gothic"/>
               </a:defRPr>
             </a:lvl1pPr>
+            <a:lvl2pPr algn="l" marL="0" indent="0">
+              <a:buNone/>
+              <a:defRPr sz="1600" b="1">
+                <a:solidFill>
+                  <a:srgbClr val="0A5A87"/>
+                </a:solidFill>
+                <a:latin typeface="Yu Gothic"/>
+                <a:ea typeface="Yu Gothic"/>
+                <a:cs typeface="Yu Gothic"/>
+              </a:defRPr>
+            </a:lvl2pPr>
+            <a:lvl3pPr algn="l" marL="0" indent="0">
+              <a:buNone/>
+              <a:defRPr sz="1350" b="1">
+                <a:solidFill>
+                  <a:srgbClr val="0A5A87"/>
+                </a:solidFill>
+                <a:latin typeface="Yu Gothic"/>
+                <a:ea typeface="Yu Gothic"/>
+                <a:cs typeface="Yu Gothic"/>
+              </a:defRPr>
+            </a:lvl3pPr>
+            <a:lvl4pPr algn="l" marL="0" indent="0">
+              <a:buNone/>
+              <a:defRPr sz="1150" b="1">
+                <a:solidFill>
+                  <a:srgbClr val="0A5A87"/>
+                </a:solidFill>
+                <a:latin typeface="Yu Gothic"/>
+                <a:ea typeface="Yu Gothic"/>
+                <a:cs typeface="Yu Gothic"/>
+              </a:defRPr>
+            </a:lvl4pPr>
           </a:lstStyle>
           <a:p>
             <a:r>
@@ -2169,6 +2526,39 @@
                 <a:cs typeface="Yu Gothic"/>
               </a:defRPr>
             </a:lvl1pPr>
+            <a:lvl2pPr algn="l" marL="0" indent="0">
+              <a:buNone/>
+              <a:defRPr sz="1250" b="0">
+                <a:solidFill>
+                  <a:srgbClr val="1A1A1A"/>
+                </a:solidFill>
+                <a:latin typeface="Yu Gothic"/>
+                <a:ea typeface="Yu Gothic"/>
+                <a:cs typeface="Yu Gothic"/>
+              </a:defRPr>
+            </a:lvl2pPr>
+            <a:lvl3pPr algn="l" marL="0" indent="0">
+              <a:buNone/>
+              <a:defRPr sz="1050" b="0">
+                <a:solidFill>
+                  <a:srgbClr val="1A1A1A"/>
+                </a:solidFill>
+                <a:latin typeface="Yu Gothic"/>
+                <a:ea typeface="Yu Gothic"/>
+                <a:cs typeface="Yu Gothic"/>
+              </a:defRPr>
+            </a:lvl3pPr>
+            <a:lvl4pPr algn="l" marL="0" indent="0">
+              <a:buNone/>
+              <a:defRPr sz="900" b="0">
+                <a:solidFill>
+                  <a:srgbClr val="1A1A1A"/>
+                </a:solidFill>
+                <a:latin typeface="Yu Gothic"/>
+                <a:ea typeface="Yu Gothic"/>
+                <a:cs typeface="Yu Gothic"/>
+              </a:defRPr>
+            </a:lvl4pPr>
           </a:lstStyle>
           <a:p>
             <a:r>
@@ -2208,6 +2598,28 @@
                 <a:cs typeface="Yu Gothic"/>
               </a:defRPr>
             </a:lvl1pPr>
+            <a:lvl2pPr algn="ctr" marL="0" indent="0">
+              <a:buNone/>
+              <a:defRPr sz="1950" b="1">
+                <a:solidFill>
+                  <a:srgbClr val="FFFFFF"/>
+                </a:solidFill>
+                <a:latin typeface="Yu Gothic"/>
+                <a:ea typeface="Yu Gothic"/>
+                <a:cs typeface="Yu Gothic"/>
+              </a:defRPr>
+            </a:lvl2pPr>
+            <a:lvl3pPr algn="ctr" marL="0" indent="0">
+              <a:buNone/>
+              <a:defRPr sz="1650" b="1">
+                <a:solidFill>
+                  <a:srgbClr val="FFFFFF"/>
+                </a:solidFill>
+                <a:latin typeface="Yu Gothic"/>
+                <a:ea typeface="Yu Gothic"/>
+                <a:cs typeface="Yu Gothic"/>
+              </a:defRPr>
+            </a:lvl3pPr>
           </a:lstStyle>
           <a:p>
             <a:r>
@@ -2247,6 +2659,39 @@
                 <a:cs typeface="Yu Gothic"/>
               </a:defRPr>
             </a:lvl1pPr>
+            <a:lvl2pPr algn="l" marL="0" indent="0">
+              <a:buNone/>
+              <a:defRPr sz="1600" b="1">
+                <a:solidFill>
+                  <a:srgbClr val="0A5A87"/>
+                </a:solidFill>
+                <a:latin typeface="Yu Gothic"/>
+                <a:ea typeface="Yu Gothic"/>
+                <a:cs typeface="Yu Gothic"/>
+              </a:defRPr>
+            </a:lvl2pPr>
+            <a:lvl3pPr algn="l" marL="0" indent="0">
+              <a:buNone/>
+              <a:defRPr sz="1350" b="1">
+                <a:solidFill>
+                  <a:srgbClr val="0A5A87"/>
+                </a:solidFill>
+                <a:latin typeface="Yu Gothic"/>
+                <a:ea typeface="Yu Gothic"/>
+                <a:cs typeface="Yu Gothic"/>
+              </a:defRPr>
+            </a:lvl3pPr>
+            <a:lvl4pPr algn="l" marL="0" indent="0">
+              <a:buNone/>
+              <a:defRPr sz="1150" b="1">
+                <a:solidFill>
+                  <a:srgbClr val="0A5A87"/>
+                </a:solidFill>
+                <a:latin typeface="Yu Gothic"/>
+                <a:ea typeface="Yu Gothic"/>
+                <a:cs typeface="Yu Gothic"/>
+              </a:defRPr>
+            </a:lvl4pPr>
           </a:lstStyle>
           <a:p>
             <a:r>
@@ -2286,6 +2731,39 @@
                 <a:cs typeface="Yu Gothic"/>
               </a:defRPr>
             </a:lvl1pPr>
+            <a:lvl2pPr algn="l" marL="0" indent="0">
+              <a:buNone/>
+              <a:defRPr sz="1250" b="0">
+                <a:solidFill>
+                  <a:srgbClr val="1A1A1A"/>
+                </a:solidFill>
+                <a:latin typeface="Yu Gothic"/>
+                <a:ea typeface="Yu Gothic"/>
+                <a:cs typeface="Yu Gothic"/>
+              </a:defRPr>
+            </a:lvl2pPr>
+            <a:lvl3pPr algn="l" marL="0" indent="0">
+              <a:buNone/>
+              <a:defRPr sz="1050" b="0">
+                <a:solidFill>
+                  <a:srgbClr val="1A1A1A"/>
+                </a:solidFill>
+                <a:latin typeface="Yu Gothic"/>
+                <a:ea typeface="Yu Gothic"/>
+                <a:cs typeface="Yu Gothic"/>
+              </a:defRPr>
+            </a:lvl3pPr>
+            <a:lvl4pPr algn="l" marL="0" indent="0">
+              <a:buNone/>
+              <a:defRPr sz="900" b="0">
+                <a:solidFill>
+                  <a:srgbClr val="1A1A1A"/>
+                </a:solidFill>
+                <a:latin typeface="Yu Gothic"/>
+                <a:ea typeface="Yu Gothic"/>
+                <a:cs typeface="Yu Gothic"/>
+              </a:defRPr>
+            </a:lvl4pPr>
           </a:lstStyle>
           <a:p>
             <a:r>
@@ -2325,6 +2803,28 @@
                 <a:cs typeface="Yu Gothic"/>
               </a:defRPr>
             </a:lvl1pPr>
+            <a:lvl2pPr algn="ctr" marL="0" indent="0">
+              <a:buNone/>
+              <a:defRPr sz="1950" b="1">
+                <a:solidFill>
+                  <a:srgbClr val="FFFFFF"/>
+                </a:solidFill>
+                <a:latin typeface="Yu Gothic"/>
+                <a:ea typeface="Yu Gothic"/>
+                <a:cs typeface="Yu Gothic"/>
+              </a:defRPr>
+            </a:lvl2pPr>
+            <a:lvl3pPr algn="ctr" marL="0" indent="0">
+              <a:buNone/>
+              <a:defRPr sz="1650" b="1">
+                <a:solidFill>
+                  <a:srgbClr val="FFFFFF"/>
+                </a:solidFill>
+                <a:latin typeface="Yu Gothic"/>
+                <a:ea typeface="Yu Gothic"/>
+                <a:cs typeface="Yu Gothic"/>
+              </a:defRPr>
+            </a:lvl3pPr>
           </a:lstStyle>
           <a:p>
             <a:r>
@@ -2364,6 +2864,39 @@
                 <a:cs typeface="Yu Gothic"/>
               </a:defRPr>
             </a:lvl1pPr>
+            <a:lvl2pPr algn="l" marL="0" indent="0">
+              <a:buNone/>
+              <a:defRPr sz="1600" b="1">
+                <a:solidFill>
+                  <a:srgbClr val="0A5A87"/>
+                </a:solidFill>
+                <a:latin typeface="Yu Gothic"/>
+                <a:ea typeface="Yu Gothic"/>
+                <a:cs typeface="Yu Gothic"/>
+              </a:defRPr>
+            </a:lvl2pPr>
+            <a:lvl3pPr algn="l" marL="0" indent="0">
+              <a:buNone/>
+              <a:defRPr sz="1350" b="1">
+                <a:solidFill>
+                  <a:srgbClr val="0A5A87"/>
+                </a:solidFill>
+                <a:latin typeface="Yu Gothic"/>
+                <a:ea typeface="Yu Gothic"/>
+                <a:cs typeface="Yu Gothic"/>
+              </a:defRPr>
+            </a:lvl3pPr>
+            <a:lvl4pPr algn="l" marL="0" indent="0">
+              <a:buNone/>
+              <a:defRPr sz="1150" b="1">
+                <a:solidFill>
+                  <a:srgbClr val="0A5A87"/>
+                </a:solidFill>
+                <a:latin typeface="Yu Gothic"/>
+                <a:ea typeface="Yu Gothic"/>
+                <a:cs typeface="Yu Gothic"/>
+              </a:defRPr>
+            </a:lvl4pPr>
           </a:lstStyle>
           <a:p>
             <a:r>
@@ -2403,6 +2936,39 @@
                 <a:cs typeface="Yu Gothic"/>
               </a:defRPr>
             </a:lvl1pPr>
+            <a:lvl2pPr algn="l" marL="0" indent="0">
+              <a:buNone/>
+              <a:defRPr sz="1250" b="0">
+                <a:solidFill>
+                  <a:srgbClr val="1A1A1A"/>
+                </a:solidFill>
+                <a:latin typeface="Yu Gothic"/>
+                <a:ea typeface="Yu Gothic"/>
+                <a:cs typeface="Yu Gothic"/>
+              </a:defRPr>
+            </a:lvl2pPr>
+            <a:lvl3pPr algn="l" marL="0" indent="0">
+              <a:buNone/>
+              <a:defRPr sz="1050" b="0">
+                <a:solidFill>
+                  <a:srgbClr val="1A1A1A"/>
+                </a:solidFill>
+                <a:latin typeface="Yu Gothic"/>
+                <a:ea typeface="Yu Gothic"/>
+                <a:cs typeface="Yu Gothic"/>
+              </a:defRPr>
+            </a:lvl3pPr>
+            <a:lvl4pPr algn="l" marL="0" indent="0">
+              <a:buNone/>
+              <a:defRPr sz="900" b="0">
+                <a:solidFill>
+                  <a:srgbClr val="1A1A1A"/>
+                </a:solidFill>
+                <a:latin typeface="Yu Gothic"/>
+                <a:ea typeface="Yu Gothic"/>
+                <a:cs typeface="Yu Gothic"/>
+              </a:defRPr>
+            </a:lvl4pPr>
           </a:lstStyle>
           <a:p>
             <a:r>
@@ -2827,6 +3393,39 @@
                 <a:cs typeface="Yu Gothic"/>
               </a:defRPr>
             </a:lvl1pPr>
+            <a:lvl2pPr algn="ctr" marL="0" indent="0">
+              <a:buNone/>
+              <a:defRPr sz="1050" b="1">
+                <a:solidFill>
+                  <a:srgbClr val="7FD4F5"/>
+                </a:solidFill>
+                <a:latin typeface="Yu Gothic"/>
+                <a:ea typeface="Yu Gothic"/>
+                <a:cs typeface="Yu Gothic"/>
+              </a:defRPr>
+            </a:lvl2pPr>
+            <a:lvl3pPr algn="ctr" marL="0" indent="0">
+              <a:buNone/>
+              <a:defRPr sz="900" b="1">
+                <a:solidFill>
+                  <a:srgbClr val="7FD4F5"/>
+                </a:solidFill>
+                <a:latin typeface="Yu Gothic"/>
+                <a:ea typeface="Yu Gothic"/>
+                <a:cs typeface="Yu Gothic"/>
+              </a:defRPr>
+            </a:lvl3pPr>
+            <a:lvl4pPr algn="ctr" marL="0" indent="0">
+              <a:buNone/>
+              <a:defRPr sz="750" b="1">
+                <a:solidFill>
+                  <a:srgbClr val="7FD4F5"/>
+                </a:solidFill>
+                <a:latin typeface="Yu Gothic"/>
+                <a:ea typeface="Yu Gothic"/>
+                <a:cs typeface="Yu Gothic"/>
+              </a:defRPr>
+            </a:lvl4pPr>
           </a:lstStyle>
           <a:p>
             <a:r>
@@ -2866,6 +3465,39 @@
                 <a:cs typeface="Yu Gothic"/>
               </a:defRPr>
             </a:lvl1pPr>
+            <a:lvl2pPr algn="ctr" marL="0" indent="0">
+              <a:buNone/>
+              <a:defRPr sz="1500" b="1">
+                <a:solidFill>
+                  <a:srgbClr val="FFFFFF"/>
+                </a:solidFill>
+                <a:latin typeface="Yu Gothic"/>
+                <a:ea typeface="Yu Gothic"/>
+                <a:cs typeface="Yu Gothic"/>
+              </a:defRPr>
+            </a:lvl2pPr>
+            <a:lvl3pPr algn="ctr" marL="0" indent="0">
+              <a:buNone/>
+              <a:defRPr sz="1300" b="1">
+                <a:solidFill>
+                  <a:srgbClr val="FFFFFF"/>
+                </a:solidFill>
+                <a:latin typeface="Yu Gothic"/>
+                <a:ea typeface="Yu Gothic"/>
+                <a:cs typeface="Yu Gothic"/>
+              </a:defRPr>
+            </a:lvl3pPr>
+            <a:lvl4pPr algn="ctr" marL="0" indent="0">
+              <a:buNone/>
+              <a:defRPr sz="1050" b="1">
+                <a:solidFill>
+                  <a:srgbClr val="FFFFFF"/>
+                </a:solidFill>
+                <a:latin typeface="Yu Gothic"/>
+                <a:ea typeface="Yu Gothic"/>
+                <a:cs typeface="Yu Gothic"/>
+              </a:defRPr>
+            </a:lvl4pPr>
           </a:lstStyle>
           <a:p>
             <a:r>
@@ -2905,6 +3537,39 @@
                 <a:cs typeface="Yu Gothic"/>
               </a:defRPr>
             </a:lvl1pPr>
+            <a:lvl2pPr algn="ctr" marL="0" indent="0">
+              <a:buNone/>
+              <a:defRPr sz="950" b="0">
+                <a:solidFill>
+                  <a:srgbClr val="E8F4FA"/>
+                </a:solidFill>
+                <a:latin typeface="Yu Gothic"/>
+                <a:ea typeface="Yu Gothic"/>
+                <a:cs typeface="Yu Gothic"/>
+              </a:defRPr>
+            </a:lvl2pPr>
+            <a:lvl3pPr algn="ctr" marL="0" indent="0">
+              <a:buNone/>
+              <a:defRPr sz="850" b="0">
+                <a:solidFill>
+                  <a:srgbClr val="E8F4FA"/>
+                </a:solidFill>
+                <a:latin typeface="Yu Gothic"/>
+                <a:ea typeface="Yu Gothic"/>
+                <a:cs typeface="Yu Gothic"/>
+              </a:defRPr>
+            </a:lvl3pPr>
+            <a:lvl4pPr algn="ctr" marL="0" indent="0">
+              <a:buNone/>
+              <a:defRPr sz="700" b="0">
+                <a:solidFill>
+                  <a:srgbClr val="E8F4FA"/>
+                </a:solidFill>
+                <a:latin typeface="Yu Gothic"/>
+                <a:ea typeface="Yu Gothic"/>
+                <a:cs typeface="Yu Gothic"/>
+              </a:defRPr>
+            </a:lvl4pPr>
           </a:lstStyle>
           <a:p>
             <a:r>
@@ -2944,6 +3609,39 @@
                 <a:cs typeface="Yu Gothic"/>
               </a:defRPr>
             </a:lvl1pPr>
+            <a:lvl2pPr algn="ctr" marL="0" indent="0">
+              <a:buNone/>
+              <a:defRPr sz="1050" b="1">
+                <a:solidFill>
+                  <a:srgbClr val="7FD4F5"/>
+                </a:solidFill>
+                <a:latin typeface="Yu Gothic"/>
+                <a:ea typeface="Yu Gothic"/>
+                <a:cs typeface="Yu Gothic"/>
+              </a:defRPr>
+            </a:lvl2pPr>
+            <a:lvl3pPr algn="ctr" marL="0" indent="0">
+              <a:buNone/>
+              <a:defRPr sz="900" b="1">
+                <a:solidFill>
+                  <a:srgbClr val="7FD4F5"/>
+                </a:solidFill>
+                <a:latin typeface="Yu Gothic"/>
+                <a:ea typeface="Yu Gothic"/>
+                <a:cs typeface="Yu Gothic"/>
+              </a:defRPr>
+            </a:lvl3pPr>
+            <a:lvl4pPr algn="ctr" marL="0" indent="0">
+              <a:buNone/>
+              <a:defRPr sz="750" b="1">
+                <a:solidFill>
+                  <a:srgbClr val="7FD4F5"/>
+                </a:solidFill>
+                <a:latin typeface="Yu Gothic"/>
+                <a:ea typeface="Yu Gothic"/>
+                <a:cs typeface="Yu Gothic"/>
+              </a:defRPr>
+            </a:lvl4pPr>
           </a:lstStyle>
           <a:p>
             <a:r>
@@ -2983,6 +3681,39 @@
                 <a:cs typeface="Yu Gothic"/>
               </a:defRPr>
             </a:lvl1pPr>
+            <a:lvl2pPr algn="ctr" marL="0" indent="0">
+              <a:buNone/>
+              <a:defRPr sz="1500" b="1">
+                <a:solidFill>
+                  <a:srgbClr val="FFFFFF"/>
+                </a:solidFill>
+                <a:latin typeface="Yu Gothic"/>
+                <a:ea typeface="Yu Gothic"/>
+                <a:cs typeface="Yu Gothic"/>
+              </a:defRPr>
+            </a:lvl2pPr>
+            <a:lvl3pPr algn="ctr" marL="0" indent="0">
+              <a:buNone/>
+              <a:defRPr sz="1300" b="1">
+                <a:solidFill>
+                  <a:srgbClr val="FFFFFF"/>
+                </a:solidFill>
+                <a:latin typeface="Yu Gothic"/>
+                <a:ea typeface="Yu Gothic"/>
+                <a:cs typeface="Yu Gothic"/>
+              </a:defRPr>
+            </a:lvl3pPr>
+            <a:lvl4pPr algn="ctr" marL="0" indent="0">
+              <a:buNone/>
+              <a:defRPr sz="1050" b="1">
+                <a:solidFill>
+                  <a:srgbClr val="FFFFFF"/>
+                </a:solidFill>
+                <a:latin typeface="Yu Gothic"/>
+                <a:ea typeface="Yu Gothic"/>
+                <a:cs typeface="Yu Gothic"/>
+              </a:defRPr>
+            </a:lvl4pPr>
           </a:lstStyle>
           <a:p>
             <a:r>
@@ -3022,6 +3753,39 @@
                 <a:cs typeface="Yu Gothic"/>
               </a:defRPr>
             </a:lvl1pPr>
+            <a:lvl2pPr algn="ctr" marL="0" indent="0">
+              <a:buNone/>
+              <a:defRPr sz="950" b="0">
+                <a:solidFill>
+                  <a:srgbClr val="E8F4FA"/>
+                </a:solidFill>
+                <a:latin typeface="Yu Gothic"/>
+                <a:ea typeface="Yu Gothic"/>
+                <a:cs typeface="Yu Gothic"/>
+              </a:defRPr>
+            </a:lvl2pPr>
+            <a:lvl3pPr algn="ctr" marL="0" indent="0">
+              <a:buNone/>
+              <a:defRPr sz="850" b="0">
+                <a:solidFill>
+                  <a:srgbClr val="E8F4FA"/>
+                </a:solidFill>
+                <a:latin typeface="Yu Gothic"/>
+                <a:ea typeface="Yu Gothic"/>
+                <a:cs typeface="Yu Gothic"/>
+              </a:defRPr>
+            </a:lvl3pPr>
+            <a:lvl4pPr algn="ctr" marL="0" indent="0">
+              <a:buNone/>
+              <a:defRPr sz="700" b="0">
+                <a:solidFill>
+                  <a:srgbClr val="E8F4FA"/>
+                </a:solidFill>
+                <a:latin typeface="Yu Gothic"/>
+                <a:ea typeface="Yu Gothic"/>
+                <a:cs typeface="Yu Gothic"/>
+              </a:defRPr>
+            </a:lvl4pPr>
           </a:lstStyle>
           <a:p>
             <a:r>
@@ -3061,6 +3825,39 @@
                 <a:cs typeface="Yu Gothic"/>
               </a:defRPr>
             </a:lvl1pPr>
+            <a:lvl2pPr algn="ctr" marL="0" indent="0">
+              <a:buNone/>
+              <a:defRPr sz="1050" b="1">
+                <a:solidFill>
+                  <a:srgbClr val="7FD4F5"/>
+                </a:solidFill>
+                <a:latin typeface="Yu Gothic"/>
+                <a:ea typeface="Yu Gothic"/>
+                <a:cs typeface="Yu Gothic"/>
+              </a:defRPr>
+            </a:lvl2pPr>
+            <a:lvl3pPr algn="ctr" marL="0" indent="0">
+              <a:buNone/>
+              <a:defRPr sz="900" b="1">
+                <a:solidFill>
+                  <a:srgbClr val="7FD4F5"/>
+                </a:solidFill>
+                <a:latin typeface="Yu Gothic"/>
+                <a:ea typeface="Yu Gothic"/>
+                <a:cs typeface="Yu Gothic"/>
+              </a:defRPr>
+            </a:lvl3pPr>
+            <a:lvl4pPr algn="ctr" marL="0" indent="0">
+              <a:buNone/>
+              <a:defRPr sz="750" b="1">
+                <a:solidFill>
+                  <a:srgbClr val="7FD4F5"/>
+                </a:solidFill>
+                <a:latin typeface="Yu Gothic"/>
+                <a:ea typeface="Yu Gothic"/>
+                <a:cs typeface="Yu Gothic"/>
+              </a:defRPr>
+            </a:lvl4pPr>
           </a:lstStyle>
           <a:p>
             <a:r>
@@ -3100,6 +3897,39 @@
                 <a:cs typeface="Yu Gothic"/>
               </a:defRPr>
             </a:lvl1pPr>
+            <a:lvl2pPr algn="ctr" marL="0" indent="0">
+              <a:buNone/>
+              <a:defRPr sz="1500" b="1">
+                <a:solidFill>
+                  <a:srgbClr val="FFFFFF"/>
+                </a:solidFill>
+                <a:latin typeface="Yu Gothic"/>
+                <a:ea typeface="Yu Gothic"/>
+                <a:cs typeface="Yu Gothic"/>
+              </a:defRPr>
+            </a:lvl2pPr>
+            <a:lvl3pPr algn="ctr" marL="0" indent="0">
+              <a:buNone/>
+              <a:defRPr sz="1300" b="1">
+                <a:solidFill>
+                  <a:srgbClr val="FFFFFF"/>
+                </a:solidFill>
+                <a:latin typeface="Yu Gothic"/>
+                <a:ea typeface="Yu Gothic"/>
+                <a:cs typeface="Yu Gothic"/>
+              </a:defRPr>
+            </a:lvl3pPr>
+            <a:lvl4pPr algn="ctr" marL="0" indent="0">
+              <a:buNone/>
+              <a:defRPr sz="1050" b="1">
+                <a:solidFill>
+                  <a:srgbClr val="FFFFFF"/>
+                </a:solidFill>
+                <a:latin typeface="Yu Gothic"/>
+                <a:ea typeface="Yu Gothic"/>
+                <a:cs typeface="Yu Gothic"/>
+              </a:defRPr>
+            </a:lvl4pPr>
           </a:lstStyle>
           <a:p>
             <a:r>
@@ -3139,6 +3969,39 @@
                 <a:cs typeface="Yu Gothic"/>
               </a:defRPr>
             </a:lvl1pPr>
+            <a:lvl2pPr algn="ctr" marL="0" indent="0">
+              <a:buNone/>
+              <a:defRPr sz="950" b="0">
+                <a:solidFill>
+                  <a:srgbClr val="E8F4FA"/>
+                </a:solidFill>
+                <a:latin typeface="Yu Gothic"/>
+                <a:ea typeface="Yu Gothic"/>
+                <a:cs typeface="Yu Gothic"/>
+              </a:defRPr>
+            </a:lvl2pPr>
+            <a:lvl3pPr algn="ctr" marL="0" indent="0">
+              <a:buNone/>
+              <a:defRPr sz="850" b="0">
+                <a:solidFill>
+                  <a:srgbClr val="E8F4FA"/>
+                </a:solidFill>
+                <a:latin typeface="Yu Gothic"/>
+                <a:ea typeface="Yu Gothic"/>
+                <a:cs typeface="Yu Gothic"/>
+              </a:defRPr>
+            </a:lvl3pPr>
+            <a:lvl4pPr algn="ctr" marL="0" indent="0">
+              <a:buNone/>
+              <a:defRPr sz="700" b="0">
+                <a:solidFill>
+                  <a:srgbClr val="E8F4FA"/>
+                </a:solidFill>
+                <a:latin typeface="Yu Gothic"/>
+                <a:ea typeface="Yu Gothic"/>
+                <a:cs typeface="Yu Gothic"/>
+              </a:defRPr>
+            </a:lvl4pPr>
           </a:lstStyle>
           <a:p>
             <a:r>
@@ -3178,6 +4041,39 @@
                 <a:cs typeface="Yu Gothic"/>
               </a:defRPr>
             </a:lvl1pPr>
+            <a:lvl2pPr algn="ctr" marL="0" indent="0">
+              <a:buNone/>
+              <a:defRPr sz="1050" b="1">
+                <a:solidFill>
+                  <a:srgbClr val="7FD4F5"/>
+                </a:solidFill>
+                <a:latin typeface="Yu Gothic"/>
+                <a:ea typeface="Yu Gothic"/>
+                <a:cs typeface="Yu Gothic"/>
+              </a:defRPr>
+            </a:lvl2pPr>
+            <a:lvl3pPr algn="ctr" marL="0" indent="0">
+              <a:buNone/>
+              <a:defRPr sz="900" b="1">
+                <a:solidFill>
+                  <a:srgbClr val="7FD4F5"/>
+                </a:solidFill>
+                <a:latin typeface="Yu Gothic"/>
+                <a:ea typeface="Yu Gothic"/>
+                <a:cs typeface="Yu Gothic"/>
+              </a:defRPr>
+            </a:lvl3pPr>
+            <a:lvl4pPr algn="ctr" marL="0" indent="0">
+              <a:buNone/>
+              <a:defRPr sz="750" b="1">
+                <a:solidFill>
+                  <a:srgbClr val="7FD4F5"/>
+                </a:solidFill>
+                <a:latin typeface="Yu Gothic"/>
+                <a:ea typeface="Yu Gothic"/>
+                <a:cs typeface="Yu Gothic"/>
+              </a:defRPr>
+            </a:lvl4pPr>
           </a:lstStyle>
           <a:p>
             <a:r>
@@ -3217,6 +4113,39 @@
                 <a:cs typeface="Yu Gothic"/>
               </a:defRPr>
             </a:lvl1pPr>
+            <a:lvl2pPr algn="ctr" marL="0" indent="0">
+              <a:buNone/>
+              <a:defRPr sz="1500" b="1">
+                <a:solidFill>
+                  <a:srgbClr val="FFFFFF"/>
+                </a:solidFill>
+                <a:latin typeface="Yu Gothic"/>
+                <a:ea typeface="Yu Gothic"/>
+                <a:cs typeface="Yu Gothic"/>
+              </a:defRPr>
+            </a:lvl2pPr>
+            <a:lvl3pPr algn="ctr" marL="0" indent="0">
+              <a:buNone/>
+              <a:defRPr sz="1300" b="1">
+                <a:solidFill>
+                  <a:srgbClr val="FFFFFF"/>
+                </a:solidFill>
+                <a:latin typeface="Yu Gothic"/>
+                <a:ea typeface="Yu Gothic"/>
+                <a:cs typeface="Yu Gothic"/>
+              </a:defRPr>
+            </a:lvl3pPr>
+            <a:lvl4pPr algn="ctr" marL="0" indent="0">
+              <a:buNone/>
+              <a:defRPr sz="1050" b="1">
+                <a:solidFill>
+                  <a:srgbClr val="FFFFFF"/>
+                </a:solidFill>
+                <a:latin typeface="Yu Gothic"/>
+                <a:ea typeface="Yu Gothic"/>
+                <a:cs typeface="Yu Gothic"/>
+              </a:defRPr>
+            </a:lvl4pPr>
           </a:lstStyle>
           <a:p>
             <a:r>
@@ -3256,6 +4185,39 @@
                 <a:cs typeface="Yu Gothic"/>
               </a:defRPr>
             </a:lvl1pPr>
+            <a:lvl2pPr algn="ctr" marL="0" indent="0">
+              <a:buNone/>
+              <a:defRPr sz="950" b="0">
+                <a:solidFill>
+                  <a:srgbClr val="E8F4FA"/>
+                </a:solidFill>
+                <a:latin typeface="Yu Gothic"/>
+                <a:ea typeface="Yu Gothic"/>
+                <a:cs typeface="Yu Gothic"/>
+              </a:defRPr>
+            </a:lvl2pPr>
+            <a:lvl3pPr algn="ctr" marL="0" indent="0">
+              <a:buNone/>
+              <a:defRPr sz="850" b="0">
+                <a:solidFill>
+                  <a:srgbClr val="E8F4FA"/>
+                </a:solidFill>
+                <a:latin typeface="Yu Gothic"/>
+                <a:ea typeface="Yu Gothic"/>
+                <a:cs typeface="Yu Gothic"/>
+              </a:defRPr>
+            </a:lvl3pPr>
+            <a:lvl4pPr algn="ctr" marL="0" indent="0">
+              <a:buNone/>
+              <a:defRPr sz="700" b="0">
+                <a:solidFill>
+                  <a:srgbClr val="E8F4FA"/>
+                </a:solidFill>
+                <a:latin typeface="Yu Gothic"/>
+                <a:ea typeface="Yu Gothic"/>
+                <a:cs typeface="Yu Gothic"/>
+              </a:defRPr>
+            </a:lvl4pPr>
           </a:lstStyle>
           <a:p>
             <a:r>
@@ -3640,6 +4602,39 @@
                 <a:cs typeface="Yu Gothic"/>
               </a:defRPr>
             </a:lvl1pPr>
+            <a:lvl2pPr algn="l" marL="0" indent="0">
+              <a:buNone/>
+              <a:defRPr sz="1400" b="1">
+                <a:solidFill>
+                  <a:srgbClr val="FFFFFF"/>
+                </a:solidFill>
+                <a:latin typeface="Yu Gothic"/>
+                <a:ea typeface="Yu Gothic"/>
+                <a:cs typeface="Yu Gothic"/>
+              </a:defRPr>
+            </a:lvl2pPr>
+            <a:lvl3pPr algn="l" marL="0" indent="0">
+              <a:buNone/>
+              <a:defRPr sz="1200" b="1">
+                <a:solidFill>
+                  <a:srgbClr val="FFFFFF"/>
+                </a:solidFill>
+                <a:latin typeface="Yu Gothic"/>
+                <a:ea typeface="Yu Gothic"/>
+                <a:cs typeface="Yu Gothic"/>
+              </a:defRPr>
+            </a:lvl3pPr>
+            <a:lvl4pPr algn="l" marL="0" indent="0">
+              <a:buNone/>
+              <a:defRPr sz="1000" b="1">
+                <a:solidFill>
+                  <a:srgbClr val="FFFFFF"/>
+                </a:solidFill>
+                <a:latin typeface="Yu Gothic"/>
+                <a:ea typeface="Yu Gothic"/>
+                <a:cs typeface="Yu Gothic"/>
+              </a:defRPr>
+            </a:lvl4pPr>
           </a:lstStyle>
           <a:p>
             <a:r>
@@ -3679,6 +4674,39 @@
                 <a:cs typeface="Yu Gothic"/>
               </a:defRPr>
             </a:lvl1pPr>
+            <a:lvl2pPr algn="l" marL="0" indent="0">
+              <a:buNone/>
+              <a:defRPr sz="1250" b="0">
+                <a:solidFill>
+                  <a:srgbClr val="1A1A1A"/>
+                </a:solidFill>
+                <a:latin typeface="Yu Gothic"/>
+                <a:ea typeface="Yu Gothic"/>
+                <a:cs typeface="Yu Gothic"/>
+              </a:defRPr>
+            </a:lvl2pPr>
+            <a:lvl3pPr algn="l" marL="0" indent="0">
+              <a:buNone/>
+              <a:defRPr sz="1050" b="0">
+                <a:solidFill>
+                  <a:srgbClr val="1A1A1A"/>
+                </a:solidFill>
+                <a:latin typeface="Yu Gothic"/>
+                <a:ea typeface="Yu Gothic"/>
+                <a:cs typeface="Yu Gothic"/>
+              </a:defRPr>
+            </a:lvl3pPr>
+            <a:lvl4pPr algn="l" marL="0" indent="0">
+              <a:buNone/>
+              <a:defRPr sz="900" b="0">
+                <a:solidFill>
+                  <a:srgbClr val="1A1A1A"/>
+                </a:solidFill>
+                <a:latin typeface="Yu Gothic"/>
+                <a:ea typeface="Yu Gothic"/>
+                <a:cs typeface="Yu Gothic"/>
+              </a:defRPr>
+            </a:lvl4pPr>
           </a:lstStyle>
           <a:p>
             <a:r>
@@ -3718,6 +4746,39 @@
                 <a:cs typeface="Yu Gothic"/>
               </a:defRPr>
             </a:lvl1pPr>
+            <a:lvl2pPr algn="l" marL="0" indent="0">
+              <a:buNone/>
+              <a:defRPr sz="1400" b="1">
+                <a:solidFill>
+                  <a:srgbClr val="FFFFFF"/>
+                </a:solidFill>
+                <a:latin typeface="Yu Gothic"/>
+                <a:ea typeface="Yu Gothic"/>
+                <a:cs typeface="Yu Gothic"/>
+              </a:defRPr>
+            </a:lvl2pPr>
+            <a:lvl3pPr algn="l" marL="0" indent="0">
+              <a:buNone/>
+              <a:defRPr sz="1200" b="1">
+                <a:solidFill>
+                  <a:srgbClr val="FFFFFF"/>
+                </a:solidFill>
+                <a:latin typeface="Yu Gothic"/>
+                <a:ea typeface="Yu Gothic"/>
+                <a:cs typeface="Yu Gothic"/>
+              </a:defRPr>
+            </a:lvl3pPr>
+            <a:lvl4pPr algn="l" marL="0" indent="0">
+              <a:buNone/>
+              <a:defRPr sz="1000" b="1">
+                <a:solidFill>
+                  <a:srgbClr val="FFFFFF"/>
+                </a:solidFill>
+                <a:latin typeface="Yu Gothic"/>
+                <a:ea typeface="Yu Gothic"/>
+                <a:cs typeface="Yu Gothic"/>
+              </a:defRPr>
+            </a:lvl4pPr>
           </a:lstStyle>
           <a:p>
             <a:r>
@@ -3757,6 +4818,39 @@
                 <a:cs typeface="Yu Gothic"/>
               </a:defRPr>
             </a:lvl1pPr>
+            <a:lvl2pPr algn="l" marL="0" indent="0">
+              <a:buNone/>
+              <a:defRPr sz="1250" b="0">
+                <a:solidFill>
+                  <a:srgbClr val="1A1A1A"/>
+                </a:solidFill>
+                <a:latin typeface="Yu Gothic"/>
+                <a:ea typeface="Yu Gothic"/>
+                <a:cs typeface="Yu Gothic"/>
+              </a:defRPr>
+            </a:lvl2pPr>
+            <a:lvl3pPr algn="l" marL="0" indent="0">
+              <a:buNone/>
+              <a:defRPr sz="1050" b="0">
+                <a:solidFill>
+                  <a:srgbClr val="1A1A1A"/>
+                </a:solidFill>
+                <a:latin typeface="Yu Gothic"/>
+                <a:ea typeface="Yu Gothic"/>
+                <a:cs typeface="Yu Gothic"/>
+              </a:defRPr>
+            </a:lvl3pPr>
+            <a:lvl4pPr algn="l" marL="0" indent="0">
+              <a:buNone/>
+              <a:defRPr sz="900" b="0">
+                <a:solidFill>
+                  <a:srgbClr val="1A1A1A"/>
+                </a:solidFill>
+                <a:latin typeface="Yu Gothic"/>
+                <a:ea typeface="Yu Gothic"/>
+                <a:cs typeface="Yu Gothic"/>
+              </a:defRPr>
+            </a:lvl4pPr>
           </a:lstStyle>
           <a:p>
             <a:r>
@@ -3908,6 +5002,27 @@
                 </a:solidFill>
               </a:defRPr>
             </a:lvl1pPr>
+            <a:lvl2pPr algn="l">
+              <a:defRPr sz="1400" b="0">
+                <a:solidFill>
+                  <a:srgbClr val="1A1A1A"/>
+                </a:solidFill>
+              </a:defRPr>
+            </a:lvl2pPr>
+            <a:lvl3pPr algn="l">
+              <a:defRPr sz="1200" b="0">
+                <a:solidFill>
+                  <a:srgbClr val="1A1A1A"/>
+                </a:solidFill>
+              </a:defRPr>
+            </a:lvl3pPr>
+            <a:lvl4pPr algn="l">
+              <a:defRPr sz="1000" b="0">
+                <a:solidFill>
+                  <a:srgbClr val="1A1A1A"/>
+                </a:solidFill>
+              </a:defRPr>
+            </a:lvl4pPr>
           </a:lstStyle>
           <a:p>
             <a:pPr lvl="0"/>
@@ -4461,28 +5576,28 @@
           <a:bodyPr anchor="t"/>
           <a:lstStyle>
             <a:lvl2pPr>
-              <a:defRPr sz="2400"/>
+              <a:defRPr sz="1150"/>
             </a:lvl2pPr>
             <a:lvl3pPr>
-              <a:defRPr sz="2000"/>
+              <a:defRPr sz="950"/>
             </a:lvl3pPr>
             <a:lvl4pPr>
-              <a:defRPr sz="1800"/>
+              <a:defRPr sz="850"/>
             </a:lvl4pPr>
             <a:lvl5pPr>
-              <a:defRPr sz="1800"/>
+              <a:defRPr sz="850"/>
             </a:lvl5pPr>
             <a:lvl6pPr>
-              <a:defRPr sz="1800"/>
+              <a:defRPr sz="850"/>
             </a:lvl6pPr>
             <a:lvl7pPr>
-              <a:defRPr sz="1800"/>
+              <a:defRPr sz="850"/>
             </a:lvl7pPr>
             <a:lvl8pPr>
-              <a:defRPr sz="1800"/>
+              <a:defRPr sz="850"/>
             </a:lvl8pPr>
             <a:lvl9pPr>
-              <a:defRPr sz="1800"/>
+              <a:defRPr sz="850"/>
             </a:lvl9pPr>
             <a:lvl1pPr algn="l">
               <a:defRPr sz="1500" b="0">
@@ -4550,28 +5665,28 @@
           <a:bodyPr anchor="t"/>
           <a:lstStyle>
             <a:lvl2pPr>
-              <a:defRPr sz="2400"/>
+              <a:defRPr sz="1150"/>
             </a:lvl2pPr>
             <a:lvl3pPr>
-              <a:defRPr sz="2000"/>
+              <a:defRPr sz="950"/>
             </a:lvl3pPr>
             <a:lvl4pPr>
-              <a:defRPr sz="1800"/>
+              <a:defRPr sz="850"/>
             </a:lvl4pPr>
             <a:lvl5pPr>
-              <a:defRPr sz="1800"/>
+              <a:defRPr sz="850"/>
             </a:lvl5pPr>
             <a:lvl6pPr>
-              <a:defRPr sz="1800"/>
+              <a:defRPr sz="850"/>
             </a:lvl6pPr>
             <a:lvl7pPr>
-              <a:defRPr sz="1800"/>
+              <a:defRPr sz="850"/>
             </a:lvl7pPr>
             <a:lvl8pPr>
-              <a:defRPr sz="1800"/>
+              <a:defRPr sz="850"/>
             </a:lvl8pPr>
             <a:lvl9pPr>
-              <a:defRPr sz="1800"/>
+              <a:defRPr sz="850"/>
             </a:lvl9pPr>
             <a:lvl1pPr algn="l">
               <a:defRPr sz="1500" b="0">
@@ -4880,11 +5995,11 @@
           <a:lstStyle>
             <a:lvl2pPr marL="457200" indent="0">
               <a:buNone/>
-              <a:defRPr sz="2000" b="1"/>
+              <a:defRPr sz="1000" b="1"/>
             </a:lvl2pPr>
             <a:lvl3pPr marL="914400" indent="0">
               <a:buNone/>
-              <a:defRPr sz="1800" b="1"/>
+              <a:defRPr sz="900" b="1"/>
             </a:lvl3pPr>
             <a:lvl4pPr marL="1371600" indent="0">
               <a:buNone/>
@@ -4948,28 +6063,28 @@
           <a:bodyPr anchor="t"/>
           <a:lstStyle>
             <a:lvl2pPr>
-              <a:defRPr sz="2000"/>
+              <a:defRPr sz="950"/>
             </a:lvl2pPr>
             <a:lvl3pPr>
-              <a:defRPr sz="1800"/>
+              <a:defRPr sz="850"/>
             </a:lvl3pPr>
             <a:lvl4pPr>
-              <a:defRPr sz="1600"/>
+              <a:defRPr sz="750"/>
             </a:lvl4pPr>
             <a:lvl5pPr>
-              <a:defRPr sz="1600"/>
+              <a:defRPr sz="750"/>
             </a:lvl5pPr>
             <a:lvl6pPr>
-              <a:defRPr sz="1600"/>
+              <a:defRPr sz="750"/>
             </a:lvl6pPr>
             <a:lvl7pPr>
-              <a:defRPr sz="1600"/>
+              <a:defRPr sz="750"/>
             </a:lvl7pPr>
             <a:lvl8pPr>
-              <a:defRPr sz="1600"/>
+              <a:defRPr sz="750"/>
             </a:lvl8pPr>
             <a:lvl9pPr>
-              <a:defRPr sz="1600"/>
+              <a:defRPr sz="750"/>
             </a:lvl9pPr>
             <a:lvl1pPr algn="l">
               <a:defRPr sz="1500" b="0">
@@ -5038,35 +6153,35 @@
           <a:lstStyle>
             <a:lvl2pPr marL="457200" indent="0">
               <a:buNone/>
-              <a:defRPr sz="2000" b="1"/>
+              <a:defRPr sz="100" b="1"/>
             </a:lvl2pPr>
             <a:lvl3pPr marL="914400" indent="0">
               <a:buNone/>
-              <a:defRPr sz="1800" b="1"/>
+              <a:defRPr sz="100" b="1"/>
             </a:lvl3pPr>
             <a:lvl4pPr marL="1371600" indent="0">
               <a:buNone/>
-              <a:defRPr sz="1600" b="1"/>
+              <a:defRPr sz="100" b="1"/>
             </a:lvl4pPr>
             <a:lvl5pPr marL="1828800" indent="0">
               <a:buNone/>
-              <a:defRPr sz="1600" b="1"/>
+              <a:defRPr sz="100" b="1"/>
             </a:lvl5pPr>
             <a:lvl6pPr marL="2286000" indent="0">
               <a:buNone/>
-              <a:defRPr sz="1600" b="1"/>
+              <a:defRPr sz="100" b="1"/>
             </a:lvl6pPr>
             <a:lvl7pPr marL="2743200" indent="0">
               <a:buNone/>
-              <a:defRPr sz="1600" b="1"/>
+              <a:defRPr sz="100" b="1"/>
             </a:lvl7pPr>
             <a:lvl8pPr marL="3200400" indent="0">
               <a:buNone/>
-              <a:defRPr sz="1600" b="1"/>
+              <a:defRPr sz="100" b="1"/>
             </a:lvl8pPr>
             <a:lvl9pPr marL="3657600" indent="0">
               <a:buNone/>
-              <a:defRPr sz="1600" b="1"/>
+              <a:defRPr sz="100" b="1"/>
             </a:lvl9pPr>
             <a:lvl1pPr algn="l" indent="0" marL="0">
               <a:buNone/>
@@ -5106,28 +6221,28 @@
           <a:bodyPr anchor="t"/>
           <a:lstStyle>
             <a:lvl2pPr>
-              <a:defRPr sz="2000"/>
+              <a:defRPr sz="900"/>
             </a:lvl2pPr>
             <a:lvl3pPr>
-              <a:defRPr sz="1800"/>
+              <a:defRPr sz="800"/>
             </a:lvl3pPr>
             <a:lvl4pPr>
-              <a:defRPr sz="1600"/>
+              <a:defRPr sz="700"/>
             </a:lvl4pPr>
             <a:lvl5pPr>
-              <a:defRPr sz="1600"/>
+              <a:defRPr sz="700"/>
             </a:lvl5pPr>
             <a:lvl6pPr>
-              <a:defRPr sz="1600"/>
+              <a:defRPr sz="700"/>
             </a:lvl6pPr>
             <a:lvl7pPr>
-              <a:defRPr sz="1600"/>
+              <a:defRPr sz="700"/>
             </a:lvl7pPr>
             <a:lvl8pPr>
-              <a:defRPr sz="1600"/>
+              <a:defRPr sz="700"/>
             </a:lvl8pPr>
             <a:lvl9pPr>
-              <a:defRPr sz="1600"/>
+              <a:defRPr sz="700"/>
             </a:lvl9pPr>
             <a:lvl1pPr algn="l">
               <a:defRPr sz="1400" b="0">
@@ -5450,6 +6565,36 @@
                 <a:ea typeface="Yu Gothic"/>
               </a:defRPr>
             </a:lvl1pPr>
+            <a:lvl2pPr algn="l" marL="0" indent="0">
+              <a:buNone/>
+              <a:defRPr sz="900" b="0" i="1">
+                <a:solidFill>
+                  <a:srgbClr val="5A6B75"/>
+                </a:solidFill>
+                <a:latin typeface="Yu Gothic"/>
+                <a:ea typeface="Yu Gothic"/>
+              </a:defRPr>
+            </a:lvl2pPr>
+            <a:lvl3pPr algn="l" marL="0" indent="0">
+              <a:buNone/>
+              <a:defRPr sz="750" b="0" i="1">
+                <a:solidFill>
+                  <a:srgbClr val="5A6B75"/>
+                </a:solidFill>
+                <a:latin typeface="Yu Gothic"/>
+                <a:ea typeface="Yu Gothic"/>
+              </a:defRPr>
+            </a:lvl3pPr>
+            <a:lvl4pPr algn="l" marL="0" indent="0">
+              <a:buNone/>
+              <a:defRPr sz="650" b="0" i="1">
+                <a:solidFill>
+                  <a:srgbClr val="5A6B75"/>
+                </a:solidFill>
+                <a:latin typeface="Yu Gothic"/>
+                <a:ea typeface="Yu Gothic"/>
+              </a:defRPr>
+            </a:lvl4pPr>
           </a:lstStyle>
           <a:p>
             <a:r>
